--- a/docs/QUAD_Executive_Pitch.pptx
+++ b/docs/QUAD_Executive_Pitch.pptx
@@ -16,6 +16,7 @@
     <p:sldId id="264" r:id="rId10"/>
     <p:sldId id="265" r:id="rId11"/>
     <p:sldId id="266" r:id="rId12"/>
+    <p:sldId id="268" r:id="rId18"/>
     <p:sldId id="267" r:id="rId13"/>
   </p:sldIdLst>
   <p:sldSz cx="12192000" cy="6858000"/>
@@ -3426,7 +3427,7 @@
               </a:defRPr>
             </a:pPr>
             <a:r>
-              <a:t>10/12</a:t>
+              <a:t>10/13</a:t>
             </a:r>
           </a:p>
         </p:txBody>
@@ -3465,7 +3466,7 @@
                 </a:solidFill>
                 <a:latin typeface="Calibri"/>
               </a:rPr>
-              <a:t>Mock Mode (today)</a:t>
+              <a:t>Mock Mode (today)  —  ./install.sh → 2002 tests pass, all tools functional</a:t>
             </a:r>
             <a:r>
               <a:rPr sz="1700">
@@ -3473,7 +3474,7 @@
                   <a:srgbClr val="2D2D2D"/>
                 </a:solidFill>
               </a:rPr>
-              <a:t>  —  ./install.sh → 933 tests pass, all tools functional</a:t>
+              <a:t/>
             </a:r>
           </a:p>
           <a:p>
@@ -3689,7 +3690,7 @@
               </a:defRPr>
             </a:pPr>
             <a:r>
-              <a:t>11/12</a:t>
+              <a:t>11/13</a:t>
             </a:r>
           </a:p>
         </p:txBody>
@@ -3843,6 +3844,348 @@
 </file>
 
 <file path=ppt/slides/slide12.xml><?xml version="1.0" encoding="utf-8"?>
+<p:sld xmlns:a="http://schemas.openxmlformats.org/drawingml/2006/main" xmlns:p="http://schemas.openxmlformats.org/presentationml/2006/main" xmlns:r="http://schemas.openxmlformats.org/officeDocument/2006/relationships">
+  <p:cSld>
+    <p:spTree>
+      <p:nvGrpSpPr>
+        <p:cNvPr id="1" name=""/>
+        <p:cNvGrpSpPr/>
+        <p:nvPr/>
+      </p:nvGrpSpPr>
+      <p:grpSpPr/>
+      <p:sp>
+        <p:nvSpPr>
+          <p:cNvPr id="2" name="Rectangle 1"/>
+          <p:cNvSpPr/>
+          <p:nvPr/>
+        </p:nvSpPr>
+        <p:spPr>
+          <a:xfrm>
+            <a:off x="0" y="0"/>
+            <a:ext cx="12192000" cy="73152"/>
+          </a:xfrm>
+          <a:prstGeom prst="rect">
+            <a:avLst/>
+          </a:prstGeom>
+          <a:solidFill>
+            <a:srgbClr val="3253DC"/>
+          </a:solidFill>
+          <a:ln>
+            <a:noFill/>
+          </a:ln>
+        </p:spPr>
+        <p:style>
+          <a:lnRef idx="1">
+            <a:schemeClr val="accent1"/>
+          </a:lnRef>
+          <a:fillRef idx="3">
+            <a:schemeClr val="accent1"/>
+          </a:fillRef>
+          <a:effectRef idx="2">
+            <a:schemeClr val="accent1"/>
+          </a:effectRef>
+          <a:fontRef idx="minor">
+            <a:schemeClr val="lt1"/>
+          </a:fontRef>
+        </p:style>
+        <p:txBody>
+          <a:bodyPr rtlCol="0" anchor="ctr"/>
+          <a:lstStyle/>
+          <a:p>
+            <a:pPr algn="ctr"/>
+          </a:p>
+        </p:txBody>
+      </p:sp>
+      <p:sp>
+        <p:nvSpPr>
+          <p:cNvPr id="3" name="TextBox 2"/>
+          <p:cNvSpPr txBox="1"/>
+          <p:nvPr/>
+        </p:nvSpPr>
+        <p:spPr>
+          <a:xfrm>
+            <a:off x="548640" y="365760"/>
+            <a:ext cx="11094720" cy="731520"/>
+          </a:xfrm>
+          <a:prstGeom prst="rect">
+            <a:avLst/>
+          </a:prstGeom>
+          <a:noFill/>
+        </p:spPr>
+        <p:txBody>
+          <a:bodyPr wrap="square">
+            <a:spAutoFit/>
+          </a:bodyPr>
+          <a:lstStyle/>
+          <a:p>
+            <a:pPr>
+              <a:defRPr sz="3200" b="1">
+                <a:solidFill>
+                  <a:srgbClr val="2D2D2D"/>
+                </a:solidFill>
+                <a:latin typeface="Calibri Light"/>
+              </a:defRPr>
+            </a:pPr>
+            <a:r>
+              <a:t>IoT Device Support</a:t>
+            </a:r>
+          </a:p>
+        </p:txBody>
+      </p:sp>
+      <p:sp>
+        <p:nvSpPr>
+          <p:cNvPr id="4" name="TextBox 3"/>
+          <p:cNvSpPr txBox="1"/>
+          <p:nvPr/>
+        </p:nvSpPr>
+        <p:spPr>
+          <a:xfrm>
+            <a:off x="548640" y="1097280"/>
+            <a:ext cx="11094720" cy="457200"/>
+          </a:xfrm>
+          <a:prstGeom prst="rect">
+            <a:avLst/>
+          </a:prstGeom>
+          <a:noFill/>
+        </p:spPr>
+        <p:txBody>
+          <a:bodyPr wrap="square">
+            <a:spAutoFit/>
+          </a:bodyPr>
+          <a:lstStyle/>
+          <a:p>
+            <a:pPr>
+              <a:defRPr sz="1600">
+                <a:solidFill>
+                  <a:srgbClr val="3253DC"/>
+                </a:solidFill>
+                <a:latin typeface="Calibri"/>
+              </a:defRPr>
+            </a:pPr>
+            <a:r>
+              <a:t>Extending QUAD across the full Qualcomm IoT SoC portfolio</a:t>
+            </a:r>
+          </a:p>
+        </p:txBody>
+      </p:sp>
+      <p:sp>
+        <p:nvSpPr>
+          <p:cNvPr id="5" name="TextBox 4"/>
+          <p:cNvSpPr txBox="1"/>
+          <p:nvPr/>
+        </p:nvSpPr>
+        <p:spPr>
+          <a:xfrm>
+            <a:off x="640080" y="1737360"/>
+            <a:ext cx="10911840" cy="4389120"/>
+          </a:xfrm>
+          <a:prstGeom prst="rect">
+            <a:avLst/>
+          </a:prstGeom>
+          <a:noFill/>
+        </p:spPr>
+        <p:txBody>
+          <a:bodyPr wrap="square">
+            <a:spAutoFit/>
+          </a:bodyPr>
+          <a:lstStyle/>
+          <a:p>
+            <a:pPr>
+              <a:spcAft>
+                <a:spcPts val="600"/>
+              </a:spcAft>
+            </a:pPr>
+            <a:r>
+              <a:rPr sz="1500" b="1">
+                <a:solidFill>
+                  <a:srgbClr val="3253DC"/>
+                </a:solidFill>
+                <a:latin typeface="Calibri"/>
+              </a:rPr>
+              <a:t>Target SoCs: </a:t>
+            </a:r>
+            <a:r>
+              <a:rPr sz="1500">
+                <a:solidFill>
+                  <a:srgbClr val="2D2D2D"/>
+                </a:solidFill>
+                <a:latin typeface="Calibri"/>
+              </a:rPr>
+              <a:t>QCS6490 (RB3 Gen 2), QCS8550, QCS8250 (RB5), QCS610, QCM2290, X75 modem</a:t>
+            </a:r>
+          </a:p>
+          <a:p>
+            <a:pPr>
+              <a:spcAft>
+                <a:spcPts val="600"/>
+              </a:spcAft>
+            </a:pPr>
+            <a:r>
+              <a:rPr sz="1500" b="1">
+                <a:solidFill>
+                  <a:srgbClr val="3253DC"/>
+                </a:solidFill>
+                <a:latin typeface="Calibri"/>
+              </a:rPr>
+              <a:t>OS / Firmware: </a:t>
+            </a:r>
+            <a:r>
+              <a:rPr sz="1500">
+                <a:solidFill>
+                  <a:srgbClr val="2D2D2D"/>
+                </a:solidFill>
+                <a:latin typeface="Calibri"/>
+              </a:rPr>
+              <a:t>Yocto meta-qcom, Qualcomm Linux, Zephyr / FreeRTOS, U-Boot, TF-A, OP-TEE</a:t>
+            </a:r>
+          </a:p>
+          <a:p>
+            <a:pPr>
+              <a:spcAft>
+                <a:spcPts val="600"/>
+              </a:spcAft>
+            </a:pPr>
+            <a:r>
+              <a:rPr sz="1500" b="1">
+                <a:solidFill>
+                  <a:srgbClr val="3253DC"/>
+                </a:solidFill>
+                <a:latin typeface="Calibri"/>
+              </a:rPr>
+              <a:t>Connectivity: </a:t>
+            </a:r>
+            <a:r>
+              <a:rPr sz="1500">
+                <a:solidFill>
+                  <a:srgbClr val="2D2D2D"/>
+                </a:solidFill>
+                <a:latin typeface="Calibri"/>
+              </a:rPr>
+              <a:t>BlueZ, OpenThread, Matter 1.4, hostapd, ModemManager (NB-IoT, LTE-M, 5G)</a:t>
+            </a:r>
+          </a:p>
+          <a:p>
+            <a:pPr>
+              <a:spcAft>
+                <a:spcPts val="600"/>
+              </a:spcAft>
+            </a:pPr>
+            <a:r>
+              <a:rPr sz="1500" b="1">
+                <a:solidFill>
+                  <a:srgbClr val="3253DC"/>
+                </a:solidFill>
+                <a:latin typeface="Calibri"/>
+              </a:rPr>
+              <a:t>IoT protocols: </a:t>
+            </a:r>
+            <a:r>
+              <a:rPr sz="1500">
+                <a:solidFill>
+                  <a:srgbClr val="2D2D2D"/>
+                </a:solidFill>
+                <a:latin typeface="Calibri"/>
+              </a:rPr>
+              <a:t>MQTT (Mosquitto / paho), CoAP (libcoap / aiocoap), LwM2M (Anjay), OPC-UA</a:t>
+            </a:r>
+          </a:p>
+          <a:p>
+            <a:pPr>
+              <a:spcAft>
+                <a:spcPts val="600"/>
+              </a:spcAft>
+            </a:pPr>
+            <a:r>
+              <a:rPr sz="1500" b="1">
+                <a:solidFill>
+                  <a:srgbClr val="3253DC"/>
+                </a:solidFill>
+                <a:latin typeface="Calibri"/>
+              </a:rPr>
+              <a:t>Cloud + OTA: </a:t>
+            </a:r>
+            <a:r>
+              <a:rPr sz="1500">
+                <a:solidFill>
+                  <a:srgbClr val="2D2D2D"/>
+                </a:solidFill>
+                <a:latin typeface="Calibri"/>
+              </a:rPr>
+              <a:t>AWS IoT v2, azure-iot-device, Greengrass, IoT Edge, Mender, RAUC, SWUpdate</a:t>
+            </a:r>
+          </a:p>
+          <a:p>
+            <a:pPr>
+              <a:spcAft>
+                <a:spcPts val="600"/>
+              </a:spcAft>
+            </a:pPr>
+            <a:r>
+              <a:rPr sz="1500" b="1">
+                <a:solidFill>
+                  <a:srgbClr val="3253DC"/>
+                </a:solidFill>
+                <a:latin typeface="Calibri"/>
+              </a:rPr>
+              <a:t>Edge AI runtime: </a:t>
+            </a:r>
+            <a:r>
+              <a:rPr sz="1500">
+                <a:solidFill>
+                  <a:srgbClr val="2D2D2D"/>
+                </a:solidFill>
+                <a:latin typeface="Calibri"/>
+              </a:rPr>
+              <a:t>QNN / QAIRT 2.x, SNPE 2.x, Hexagon SDK 5, AIMET, Qualcomm AI Hub</a:t>
+            </a:r>
+          </a:p>
+        </p:txBody>
+      </p:sp>
+      <p:sp>
+        <p:nvSpPr>
+          <p:cNvPr id="6" name="TextBox 5"/>
+          <p:cNvSpPr txBox="1"/>
+          <p:nvPr/>
+        </p:nvSpPr>
+        <p:spPr>
+          <a:xfrm>
+            <a:off x="640080" y="5943600"/>
+            <a:ext cx="10911840" cy="457200"/>
+          </a:xfrm>
+          <a:prstGeom prst="rect">
+            <a:avLst/>
+          </a:prstGeom>
+          <a:noFill/>
+        </p:spPr>
+        <p:txBody>
+          <a:bodyPr wrap="none">
+            <a:spAutoFit/>
+          </a:bodyPr>
+          <a:lstStyle/>
+          <a:p>
+            <a:pPr>
+              <a:defRPr sz="1200" i="1">
+                <a:solidFill>
+                  <a:srgbClr val="666666"/>
+                </a:solidFill>
+                <a:latin typeface="Calibri"/>
+              </a:defRPr>
+            </a:pPr>
+            <a:r>
+              <a:t>Full catalogue: docs/IOT_DEPENDENCIES.xlsx — 111 components across 14 categories</a:t>
+            </a:r>
+          </a:p>
+        </p:txBody>
+      </p:sp>
+    </p:spTree>
+  </p:cSld>
+  <p:clrMapOvr>
+    <a:masterClrMapping/>
+  </p:clrMapOvr>
+</p:sld>
+</file>
+
+<file path=ppt/slides/slide13.xml><?xml version="1.0" encoding="utf-8"?>
 <p:sld xmlns:a="http://schemas.openxmlformats.org/drawingml/2006/main" xmlns:r="http://schemas.openxmlformats.org/officeDocument/2006/relationships" xmlns:p="http://schemas.openxmlformats.org/presentationml/2006/main">
   <p:cSld>
     <p:spTree>
@@ -4145,7 +4488,7 @@
               </a:defRPr>
             </a:pPr>
             <a:r>
-              <a:t>2/12</a:t>
+              <a:t>2/13</a:t>
             </a:r>
           </a:p>
         </p:txBody>
@@ -4389,7 +4732,7 @@
               </a:defRPr>
             </a:pPr>
             <a:r>
-              <a:t>3/12</a:t>
+              <a:t>3/13</a:t>
             </a:r>
           </a:p>
         </p:txBody>
@@ -5035,7 +5378,7 @@
               </a:defRPr>
             </a:pPr>
             <a:r>
-              <a:t>4/12</a:t>
+              <a:t>4/13</a:t>
             </a:r>
           </a:p>
         </p:txBody>
@@ -5301,7 +5644,7 @@
               </a:defRPr>
             </a:pPr>
             <a:r>
-              <a:t>5/12</a:t>
+              <a:t>5/13</a:t>
             </a:r>
           </a:p>
         </p:txBody>
@@ -5340,7 +5683,7 @@
               </a:defRPr>
             </a:pPr>
             <a:r>
-              <a:t>933 Tests  |  15 Modules  |  30+ Templates  |  15,000+ Lines</a:t>
+              <a:t>2002 Tests  |  120+ Modules  |  30+ Templates  |  25,000+ Lines</a:t>
             </a:r>
           </a:p>
         </p:txBody>
@@ -5929,7 +6272,7 @@
               </a:defRPr>
             </a:pPr>
             <a:r>
-              <a:t>6/12</a:t>
+              <a:t>6/13</a:t>
             </a:r>
           </a:p>
         </p:txBody>
@@ -6511,7 +6854,7 @@
               </a:defRPr>
             </a:pPr>
             <a:r>
-              <a:t>7/12</a:t>
+              <a:t>7/13</a:t>
             </a:r>
           </a:p>
         </p:txBody>
@@ -6743,7 +7086,7 @@
               </a:defRPr>
             </a:pPr>
             <a:r>
-              <a:t>8/12</a:t>
+              <a:t>8/13</a:t>
             </a:r>
           </a:p>
         </p:txBody>
@@ -7325,7 +7668,7 @@
               </a:defRPr>
             </a:pPr>
             <a:r>
-              <a:t>9/12</a:t>
+              <a:t>9/13</a:t>
             </a:r>
           </a:p>
         </p:txBody>
@@ -7388,7 +7731,7 @@
                 </a:solidFill>
                 <a:latin typeface="Calibri"/>
               </a:rPr>
-              <a:t>2. Hardware (3 devices)</a:t>
+              <a:t>2. Hardware (4 device classes)  —  Snapdragon X Elite, Snapdragon 8 Elite, Arduino UNO Q, Qualcomm IoT SoC kit (RB3 Gen 2 / RB5 / QCS6490)</a:t>
             </a:r>
             <a:r>
               <a:rPr sz="1800">
@@ -7396,7 +7739,7 @@
                   <a:srgbClr val="2D2D2D"/>
                 </a:solidFill>
               </a:rPr>
-              <a:t>  —  Snapdragon X Elite, Arduino UNO Q, Snapdragon 8 Elite</a:t>
+              <a:t/>
             </a:r>
           </a:p>
           <a:p>
